--- a/docs/guide/presentation/CryptoCopilot-DemoDay.pptx
+++ b/docs/guide/presentation/CryptoCopilot-DemoDay.pptx
@@ -9503,7 +9503,7 @@
                 </a:solidFill>
                 <a:latin typeface="Calibri"/>
               </a:rPr>
-              <a:t>Never gives trading advice — by design.</a:t>
+              <a:t>Gives cited, signal-based views — flagged ‘educational, not financial advice’.</a:t>
             </a:r>
           </a:p>
           <a:p>
